--- a/red_analysis/presentations/BM55_Relaxation_Benchmark_blue.pptx
+++ b/red_analysis/presentations/BM55_Relaxation_Benchmark_blue.pptx
@@ -5956,7 +5956,7 @@
               </a:defRPr>
             </a:pPr>
             <a:r>
-              <a:t>Rosetta MolProbity: 257 targets (56K+ rows)</a:t>
+              <a:t>Rosetta MolProbity: 258 targets (56K+ rows)</a:t>
             </a:r>
           </a:p>
           <a:p>

--- a/red_analysis/presentations/BM55_Relaxation_Benchmark_blue.pptx
+++ b/red_analysis/presentations/BM55_Relaxation_Benchmark_blue.pptx
@@ -5956,7 +5956,7 @@
               </a:defRPr>
             </a:pPr>
             <a:r>
-              <a:t>Rosetta MolProbity: 258 targets (56K+ rows)</a:t>
+              <a:t>Rosetta MolProbity: 257 targets (56K+ rows)</a:t>
             </a:r>
           </a:p>
           <a:p>
